--- a/Reporte 170326.pptx
+++ b/Reporte 170326.pptx
@@ -5,45 +5,48 @@
     <p:sldMasterId id="2147483672" r:id="rId1"/>
   </p:sldMasterIdLst>
   <p:notesMasterIdLst>
-    <p:notesMasterId r:id="rId15"/>
+    <p:notesMasterId r:id="rId18"/>
   </p:notesMasterIdLst>
   <p:sldIdLst>
     <p:sldId id="350" r:id="rId2"/>
     <p:sldId id="352" r:id="rId3"/>
     <p:sldId id="365" r:id="rId4"/>
     <p:sldId id="378" r:id="rId5"/>
-    <p:sldId id="281" r:id="rId6"/>
-    <p:sldId id="351" r:id="rId7"/>
-    <p:sldId id="369" r:id="rId8"/>
-    <p:sldId id="361" r:id="rId9"/>
-    <p:sldId id="371" r:id="rId10"/>
-    <p:sldId id="370" r:id="rId11"/>
-    <p:sldId id="379" r:id="rId12"/>
-    <p:sldId id="380" r:id="rId13"/>
-    <p:sldId id="280" r:id="rId14"/>
+    <p:sldId id="381" r:id="rId6"/>
+    <p:sldId id="382" r:id="rId7"/>
+    <p:sldId id="383" r:id="rId8"/>
+    <p:sldId id="281" r:id="rId9"/>
+    <p:sldId id="351" r:id="rId10"/>
+    <p:sldId id="369" r:id="rId11"/>
+    <p:sldId id="361" r:id="rId12"/>
+    <p:sldId id="371" r:id="rId13"/>
+    <p:sldId id="370" r:id="rId14"/>
+    <p:sldId id="379" r:id="rId15"/>
+    <p:sldId id="380" r:id="rId16"/>
+    <p:sldId id="280" r:id="rId17"/>
   </p:sldIdLst>
   <p:sldSz cx="9144000" cy="5143500" type="screen16x9"/>
   <p:notesSz cx="6858000" cy="9144000"/>
   <p:embeddedFontLst>
     <p:embeddedFont>
       <p:font typeface="Montserrat" panose="00000500000000000000" pitchFamily="2" charset="0"/>
-      <p:regular r:id="rId16"/>
-      <p:bold r:id="rId17"/>
-      <p:italic r:id="rId18"/>
-      <p:boldItalic r:id="rId19"/>
-    </p:embeddedFont>
-    <p:embeddedFont>
-      <p:font typeface="Montserrat Black" panose="00000A00000000000000" pitchFamily="2" charset="0"/>
+      <p:regular r:id="rId19"/>
       <p:bold r:id="rId20"/>
       <p:italic r:id="rId21"/>
       <p:boldItalic r:id="rId22"/>
     </p:embeddedFont>
     <p:embeddedFont>
+      <p:font typeface="Montserrat Black" panose="00000A00000000000000" pitchFamily="2" charset="0"/>
+      <p:bold r:id="rId23"/>
+      <p:italic r:id="rId24"/>
+      <p:boldItalic r:id="rId25"/>
+    </p:embeddedFont>
+    <p:embeddedFont>
       <p:font typeface="Segoe UI" panose="020B0502040204020203" pitchFamily="34" charset="0"/>
-      <p:regular r:id="rId23"/>
-      <p:bold r:id="rId24"/>
-      <p:italic r:id="rId25"/>
-      <p:boldItalic r:id="rId26"/>
+      <p:regular r:id="rId26"/>
+      <p:bold r:id="rId27"/>
+      <p:italic r:id="rId28"/>
+      <p:boldItalic r:id="rId29"/>
     </p:embeddedFont>
   </p:embeddedFontLst>
   <p:defaultTextStyle>
@@ -6052,7 +6055,7 @@
                 <a:latin typeface="Montserrat Black"/>
                 <a:sym typeface="Arial"/>
               </a:rPr>
-              <a:t>Elaborado: 17</a:t>
+              <a:t>Elaborado: 18</a:t>
             </a:r>
             <a:r>
               <a:rPr lang="es-MX" sz="1600" dirty="0">
@@ -6116,6 +6119,306 @@
 </file>
 
 <file path=ppt/slides/slide10.xml><?xml version="1.0" encoding="utf-8"?>
+<p:sld xmlns:a="http://schemas.openxmlformats.org/drawingml/2006/main" xmlns:r="http://schemas.openxmlformats.org/officeDocument/2006/relationships" xmlns:p="http://schemas.openxmlformats.org/presentationml/2006/main">
+  <p:cSld>
+    <p:spTree>
+      <p:nvGrpSpPr>
+        <p:cNvPr id="1" name="">
+          <a:extLst>
+            <a:ext uri="{FF2B5EF4-FFF2-40B4-BE49-F238E27FC236}">
+              <a16:creationId xmlns:a16="http://schemas.microsoft.com/office/drawing/2014/main" id="{DB953E20-D2E3-C7B6-3681-7F75E49F37EF}"/>
+            </a:ext>
+          </a:extLst>
+        </p:cNvPr>
+        <p:cNvGrpSpPr/>
+        <p:nvPr/>
+      </p:nvGrpSpPr>
+      <p:grpSpPr>
+        <a:xfrm>
+          <a:off x="0" y="0"/>
+          <a:ext cx="0" cy="0"/>
+          <a:chOff x="0" y="0"/>
+          <a:chExt cx="0" cy="0"/>
+        </a:xfrm>
+      </p:grpSpPr>
+      <p:sp>
+        <p:nvSpPr>
+          <p:cNvPr id="5" name="CuadroTexto 4">
+            <a:extLst>
+              <a:ext uri="{FF2B5EF4-FFF2-40B4-BE49-F238E27FC236}">
+                <a16:creationId xmlns:a16="http://schemas.microsoft.com/office/drawing/2014/main" id="{2D220DED-6E95-D0AE-57E3-7DFB60F03ADD}"/>
+              </a:ext>
+            </a:extLst>
+          </p:cNvPr>
+          <p:cNvSpPr txBox="1"/>
+          <p:nvPr/>
+        </p:nvSpPr>
+        <p:spPr>
+          <a:xfrm>
+            <a:off x="1183340" y="0"/>
+            <a:ext cx="6763871" cy="369332"/>
+          </a:xfrm>
+          <a:prstGeom prst="rect">
+            <a:avLst/>
+          </a:prstGeom>
+          <a:noFill/>
+        </p:spPr>
+        <p:txBody>
+          <a:bodyPr wrap="square" rtlCol="0">
+            <a:spAutoFit/>
+          </a:bodyPr>
+          <a:lstStyle/>
+          <a:p>
+            <a:pPr algn="ctr"/>
+            <a:r>
+              <a:rPr lang="es-MX" sz="1800" b="1" dirty="0">
+                <a:latin typeface="Montserrat" panose="00000500000000000000" pitchFamily="2" charset="0"/>
+              </a:rPr>
+              <a:t>Información de gobierno en radiodifusoras</a:t>
+            </a:r>
+          </a:p>
+        </p:txBody>
+      </p:sp>
+      <p:pic>
+        <p:nvPicPr>
+          <p:cNvPr id="3" name="Imagen 2">
+            <a:extLst>
+              <a:ext uri="{FF2B5EF4-FFF2-40B4-BE49-F238E27FC236}">
+                <a16:creationId xmlns:a16="http://schemas.microsoft.com/office/drawing/2014/main" id="{B7844955-CC53-01DE-DF8E-5B8B58D41505}"/>
+              </a:ext>
+            </a:extLst>
+          </p:cNvPr>
+          <p:cNvPicPr>
+            <a:picLocks noChangeAspect="1"/>
+          </p:cNvPicPr>
+          <p:nvPr/>
+        </p:nvPicPr>
+        <p:blipFill>
+          <a:blip r:embed="rId2"/>
+          <a:stretch>
+            <a:fillRect/>
+          </a:stretch>
+        </p:blipFill>
+        <p:spPr>
+          <a:xfrm>
+            <a:off x="0" y="732901"/>
+            <a:ext cx="9144000" cy="3677697"/>
+          </a:xfrm>
+          <a:prstGeom prst="rect">
+            <a:avLst/>
+          </a:prstGeom>
+        </p:spPr>
+      </p:pic>
+    </p:spTree>
+    <p:extLst>
+      <p:ext uri="{BB962C8B-B14F-4D97-AF65-F5344CB8AC3E}">
+        <p14:creationId xmlns:p14="http://schemas.microsoft.com/office/powerpoint/2010/main" val="4224919290"/>
+      </p:ext>
+    </p:extLst>
+  </p:cSld>
+  <p:clrMapOvr>
+    <a:masterClrMapping/>
+  </p:clrMapOvr>
+</p:sld>
+</file>
+
+<file path=ppt/slides/slide11.xml><?xml version="1.0" encoding="utf-8"?>
+<p:sld xmlns:a="http://schemas.openxmlformats.org/drawingml/2006/main" xmlns:r="http://schemas.openxmlformats.org/officeDocument/2006/relationships" xmlns:p="http://schemas.openxmlformats.org/presentationml/2006/main">
+  <p:cSld>
+    <p:spTree>
+      <p:nvGrpSpPr>
+        <p:cNvPr id="1" name=""/>
+        <p:cNvGrpSpPr/>
+        <p:nvPr/>
+      </p:nvGrpSpPr>
+      <p:grpSpPr>
+        <a:xfrm>
+          <a:off x="0" y="0"/>
+          <a:ext cx="0" cy="0"/>
+          <a:chOff x="0" y="0"/>
+          <a:chExt cx="0" cy="0"/>
+        </a:xfrm>
+      </p:grpSpPr>
+      <p:sp>
+        <p:nvSpPr>
+          <p:cNvPr id="2" name="CuadroTexto 1">
+            <a:extLst>
+              <a:ext uri="{FF2B5EF4-FFF2-40B4-BE49-F238E27FC236}">
+                <a16:creationId xmlns:a16="http://schemas.microsoft.com/office/drawing/2014/main" id="{E270743E-55A0-8447-939B-33D92F1087F2}"/>
+              </a:ext>
+            </a:extLst>
+          </p:cNvPr>
+          <p:cNvSpPr txBox="1"/>
+          <p:nvPr/>
+        </p:nvSpPr>
+        <p:spPr>
+          <a:xfrm>
+            <a:off x="1183340" y="0"/>
+            <a:ext cx="6763871" cy="369332"/>
+          </a:xfrm>
+          <a:prstGeom prst="rect">
+            <a:avLst/>
+          </a:prstGeom>
+          <a:noFill/>
+        </p:spPr>
+        <p:txBody>
+          <a:bodyPr wrap="square" rtlCol="0">
+            <a:spAutoFit/>
+          </a:bodyPr>
+          <a:lstStyle/>
+          <a:p>
+            <a:pPr algn="ctr"/>
+            <a:r>
+              <a:rPr lang="es-MX" sz="1800" b="1" dirty="0">
+                <a:latin typeface="Montserrat" panose="00000500000000000000" pitchFamily="2" charset="0"/>
+              </a:rPr>
+              <a:t>Información de gobierno en radiodifusoras</a:t>
+            </a:r>
+          </a:p>
+        </p:txBody>
+      </p:sp>
+      <p:pic>
+        <p:nvPicPr>
+          <p:cNvPr id="4" name="Imagen 3">
+            <a:extLst>
+              <a:ext uri="{FF2B5EF4-FFF2-40B4-BE49-F238E27FC236}">
+                <a16:creationId xmlns:a16="http://schemas.microsoft.com/office/drawing/2014/main" id="{356F2809-E4CD-94BA-AAA3-54A9165971E7}"/>
+              </a:ext>
+            </a:extLst>
+          </p:cNvPr>
+          <p:cNvPicPr>
+            <a:picLocks noChangeAspect="1"/>
+          </p:cNvPicPr>
+          <p:nvPr/>
+        </p:nvPicPr>
+        <p:blipFill>
+          <a:blip r:embed="rId2"/>
+          <a:stretch>
+            <a:fillRect/>
+          </a:stretch>
+        </p:blipFill>
+        <p:spPr>
+          <a:xfrm>
+            <a:off x="0" y="836760"/>
+            <a:ext cx="9144000" cy="3469979"/>
+          </a:xfrm>
+          <a:prstGeom prst="rect">
+            <a:avLst/>
+          </a:prstGeom>
+        </p:spPr>
+      </p:pic>
+    </p:spTree>
+    <p:extLst>
+      <p:ext uri="{BB962C8B-B14F-4D97-AF65-F5344CB8AC3E}">
+        <p14:creationId xmlns:p14="http://schemas.microsoft.com/office/powerpoint/2010/main" val="1977228479"/>
+      </p:ext>
+    </p:extLst>
+  </p:cSld>
+  <p:clrMapOvr>
+    <a:masterClrMapping/>
+  </p:clrMapOvr>
+</p:sld>
+</file>
+
+<file path=ppt/slides/slide12.xml><?xml version="1.0" encoding="utf-8"?>
+<p:sld xmlns:a="http://schemas.openxmlformats.org/drawingml/2006/main" xmlns:r="http://schemas.openxmlformats.org/officeDocument/2006/relationships" xmlns:p="http://schemas.openxmlformats.org/presentationml/2006/main">
+  <p:cSld>
+    <p:spTree>
+      <p:nvGrpSpPr>
+        <p:cNvPr id="1" name=""/>
+        <p:cNvGrpSpPr/>
+        <p:nvPr/>
+      </p:nvGrpSpPr>
+      <p:grpSpPr>
+        <a:xfrm>
+          <a:off x="0" y="0"/>
+          <a:ext cx="0" cy="0"/>
+          <a:chOff x="0" y="0"/>
+          <a:chExt cx="0" cy="0"/>
+        </a:xfrm>
+      </p:grpSpPr>
+      <p:sp>
+        <p:nvSpPr>
+          <p:cNvPr id="6" name="CuadroTexto 5">
+            <a:extLst>
+              <a:ext uri="{FF2B5EF4-FFF2-40B4-BE49-F238E27FC236}">
+                <a16:creationId xmlns:a16="http://schemas.microsoft.com/office/drawing/2014/main" id="{CE4F37E4-6BA2-F83F-177F-21C522FF978A}"/>
+              </a:ext>
+            </a:extLst>
+          </p:cNvPr>
+          <p:cNvSpPr txBox="1"/>
+          <p:nvPr/>
+        </p:nvSpPr>
+        <p:spPr>
+          <a:xfrm>
+            <a:off x="1926166" y="88135"/>
+            <a:ext cx="5291667" cy="307777"/>
+          </a:xfrm>
+          <a:prstGeom prst="rect">
+            <a:avLst/>
+          </a:prstGeom>
+          <a:noFill/>
+        </p:spPr>
+        <p:txBody>
+          <a:bodyPr wrap="square" rtlCol="0">
+            <a:spAutoFit/>
+          </a:bodyPr>
+          <a:lstStyle/>
+          <a:p>
+            <a:pPr algn="ctr"/>
+            <a:r>
+              <a:rPr lang="es-MX" b="1" dirty="0">
+                <a:latin typeface="Montserrat" pitchFamily="2" charset="0"/>
+              </a:rPr>
+              <a:t>Temas de gobierno por radiodifusora</a:t>
+            </a:r>
+          </a:p>
+        </p:txBody>
+      </p:sp>
+      <p:pic>
+        <p:nvPicPr>
+          <p:cNvPr id="4" name="Imagen 3">
+            <a:extLst>
+              <a:ext uri="{FF2B5EF4-FFF2-40B4-BE49-F238E27FC236}">
+                <a16:creationId xmlns:a16="http://schemas.microsoft.com/office/drawing/2014/main" id="{D3C66B1C-BF86-893D-1A86-012ED2610282}"/>
+              </a:ext>
+            </a:extLst>
+          </p:cNvPr>
+          <p:cNvPicPr>
+            <a:picLocks noChangeAspect="1"/>
+          </p:cNvPicPr>
+          <p:nvPr/>
+        </p:nvPicPr>
+        <p:blipFill>
+          <a:blip r:embed="rId2"/>
+          <a:stretch>
+            <a:fillRect/>
+          </a:stretch>
+        </p:blipFill>
+        <p:spPr>
+          <a:xfrm>
+            <a:off x="0" y="1236971"/>
+            <a:ext cx="9144000" cy="2669557"/>
+          </a:xfrm>
+          <a:prstGeom prst="rect">
+            <a:avLst/>
+          </a:prstGeom>
+        </p:spPr>
+      </p:pic>
+    </p:spTree>
+    <p:extLst>
+      <p:ext uri="{BB962C8B-B14F-4D97-AF65-F5344CB8AC3E}">
+        <p14:creationId xmlns:p14="http://schemas.microsoft.com/office/powerpoint/2010/main" val="3202946265"/>
+      </p:ext>
+    </p:extLst>
+  </p:cSld>
+  <p:clrMapOvr>
+    <a:masterClrMapping/>
+  </p:clrMapOvr>
+</p:sld>
+</file>
+
+<file path=ppt/slides/slide13.xml><?xml version="1.0" encoding="utf-8"?>
 <p:sld xmlns:a="http://schemas.openxmlformats.org/drawingml/2006/main" xmlns:r="http://schemas.openxmlformats.org/officeDocument/2006/relationships" xmlns:p="http://schemas.openxmlformats.org/presentationml/2006/main">
   <p:cSld>
     <p:spTree>
@@ -6172,10 +6475,10 @@
       </p:sp>
       <p:pic>
         <p:nvPicPr>
-          <p:cNvPr id="3" name="Imagen 2">
+          <p:cNvPr id="4" name="Imagen 3">
             <a:extLst>
               <a:ext uri="{FF2B5EF4-FFF2-40B4-BE49-F238E27FC236}">
-                <a16:creationId xmlns:a16="http://schemas.microsoft.com/office/drawing/2014/main" id="{9C0EB269-54C8-5EC2-19BF-1F5E7A630C24}"/>
+                <a16:creationId xmlns:a16="http://schemas.microsoft.com/office/drawing/2014/main" id="{B3D09607-0F8B-FC8B-DD7B-E67CF164679C}"/>
               </a:ext>
             </a:extLst>
           </p:cNvPr>
@@ -6192,8 +6495,8 @@
         </p:blipFill>
         <p:spPr>
           <a:xfrm>
-            <a:off x="0" y="1320042"/>
-            <a:ext cx="9144000" cy="2503415"/>
+            <a:off x="0" y="1340338"/>
+            <a:ext cx="9144000" cy="2462824"/>
           </a:xfrm>
           <a:prstGeom prst="rect">
             <a:avLst/>
@@ -6213,7 +6516,7 @@
 </p:sld>
 </file>
 
-<file path=ppt/slides/slide11.xml><?xml version="1.0" encoding="utf-8"?>
+<file path=ppt/slides/slide14.xml><?xml version="1.0" encoding="utf-8"?>
 <p:sld xmlns:a="http://schemas.openxmlformats.org/drawingml/2006/main" xmlns:r="http://schemas.openxmlformats.org/officeDocument/2006/relationships" xmlns:p="http://schemas.openxmlformats.org/presentationml/2006/main">
   <p:cSld>
     <p:spTree>
@@ -6276,32 +6579,49 @@
       </p:sp>
       <p:pic>
         <p:nvPicPr>
-          <p:cNvPr id="3" name="Imagen 2">
+          <p:cNvPr id="1026" name="Picture 2">
             <a:extLst>
               <a:ext uri="{FF2B5EF4-FFF2-40B4-BE49-F238E27FC236}">
-                <a16:creationId xmlns:a16="http://schemas.microsoft.com/office/drawing/2014/main" id="{7A0CB5EC-60D9-1209-C774-48F8FA7C5C97}"/>
+                <a16:creationId xmlns:a16="http://schemas.microsoft.com/office/drawing/2014/main" id="{A859E621-A38C-C41D-7946-F38248538720}"/>
               </a:ext>
             </a:extLst>
           </p:cNvPr>
           <p:cNvPicPr>
-            <a:picLocks noChangeAspect="1"/>
+            <a:picLocks noChangeAspect="1" noChangeArrowheads="1"/>
           </p:cNvPicPr>
           <p:nvPr/>
         </p:nvPicPr>
         <p:blipFill>
-          <a:blip r:embed="rId2"/>
+          <a:blip r:embed="rId2">
+            <a:extLst>
+              <a:ext uri="{28A0092B-C50C-407E-A947-70E740481C1C}">
+                <a14:useLocalDpi xmlns:a14="http://schemas.microsoft.com/office/drawing/2010/main" val="0"/>
+              </a:ext>
+            </a:extLst>
+          </a:blip>
+          <a:srcRect/>
           <a:stretch>
             <a:fillRect/>
           </a:stretch>
         </p:blipFill>
-        <p:spPr>
+        <p:spPr bwMode="auto">
           <a:xfrm>
-            <a:off x="0" y="762310"/>
-            <a:ext cx="9144000" cy="3618879"/>
+            <a:off x="2038350" y="666750"/>
+            <a:ext cx="5067300" cy="3810000"/>
           </a:xfrm>
           <a:prstGeom prst="rect">
             <a:avLst/>
           </a:prstGeom>
+          <a:noFill/>
+          <a:extLst>
+            <a:ext uri="{909E8E84-426E-40DD-AFC4-6F175D3DCCD1}">
+              <a14:hiddenFill xmlns:a14="http://schemas.microsoft.com/office/drawing/2010/main">
+                <a:solidFill>
+                  <a:srgbClr val="FFFFFF"/>
+                </a:solidFill>
+              </a14:hiddenFill>
+            </a:ext>
+          </a:extLst>
         </p:spPr>
       </p:pic>
     </p:spTree>
@@ -6317,7 +6637,7 @@
 </p:sld>
 </file>
 
-<file path=ppt/slides/slide12.xml><?xml version="1.0" encoding="utf-8"?>
+<file path=ppt/slides/slide15.xml><?xml version="1.0" encoding="utf-8"?>
 <p:sld xmlns:a="http://schemas.openxmlformats.org/drawingml/2006/main" xmlns:r="http://schemas.openxmlformats.org/officeDocument/2006/relationships" xmlns:p="http://schemas.openxmlformats.org/presentationml/2006/main">
   <p:cSld>
     <p:spTree>
@@ -6379,10 +6699,10 @@
       </p:sp>
       <p:pic>
         <p:nvPicPr>
-          <p:cNvPr id="8" name="Imagen 7">
+          <p:cNvPr id="3" name="Imagen 2">
             <a:extLst>
               <a:ext uri="{FF2B5EF4-FFF2-40B4-BE49-F238E27FC236}">
-                <a16:creationId xmlns:a16="http://schemas.microsoft.com/office/drawing/2014/main" id="{251A0EDC-7AE9-CA3E-AE4E-E533A9BEC3B8}"/>
+                <a16:creationId xmlns:a16="http://schemas.microsoft.com/office/drawing/2014/main" id="{942A5B69-512A-0FDA-6AED-1560348DF4DD}"/>
               </a:ext>
             </a:extLst>
           </p:cNvPr>
@@ -6399,8 +6719,8 @@
         </p:blipFill>
         <p:spPr>
           <a:xfrm>
-            <a:off x="0" y="779203"/>
-            <a:ext cx="9144000" cy="3585093"/>
+            <a:off x="951995" y="1152327"/>
+            <a:ext cx="7240010" cy="2838846"/>
           </a:xfrm>
           <a:prstGeom prst="rect">
             <a:avLst/>
@@ -6420,7 +6740,7 @@
 </p:sld>
 </file>
 
-<file path=ppt/slides/slide13.xml><?xml version="1.0" encoding="utf-8"?>
+<file path=ppt/slides/slide16.xml><?xml version="1.0" encoding="utf-8"?>
 <p:sld xmlns:a="http://schemas.openxmlformats.org/drawingml/2006/main" xmlns:r="http://schemas.openxmlformats.org/officeDocument/2006/relationships" xmlns:p="http://schemas.openxmlformats.org/presentationml/2006/main">
   <p:cSld>
     <p:spTree>
@@ -6547,10 +6867,10 @@
       </p:sp>
       <p:pic>
         <p:nvPicPr>
-          <p:cNvPr id="6" name="Imagen 5">
+          <p:cNvPr id="8" name="Imagen 7">
             <a:extLst>
               <a:ext uri="{FF2B5EF4-FFF2-40B4-BE49-F238E27FC236}">
-                <a16:creationId xmlns:a16="http://schemas.microsoft.com/office/drawing/2014/main" id="{BA5F7886-E92D-D843-2647-CA3EE41DBD7B}"/>
+                <a16:creationId xmlns:a16="http://schemas.microsoft.com/office/drawing/2014/main" id="{4502DFB4-50AD-FCE4-5FEA-08184E1B11CA}"/>
               </a:ext>
             </a:extLst>
           </p:cNvPr>
@@ -6567,8 +6887,8 @@
         </p:blipFill>
         <p:spPr>
           <a:xfrm>
-            <a:off x="0" y="453856"/>
-            <a:ext cx="9144000" cy="4235787"/>
+            <a:off x="0" y="453439"/>
+            <a:ext cx="9144000" cy="4236621"/>
           </a:xfrm>
           <a:prstGeom prst="rect">
             <a:avLst/>
@@ -6647,10 +6967,10 @@
       </p:sp>
       <p:pic>
         <p:nvPicPr>
-          <p:cNvPr id="4" name="Imagen 3">
+          <p:cNvPr id="9" name="Imagen 8">
             <a:extLst>
               <a:ext uri="{FF2B5EF4-FFF2-40B4-BE49-F238E27FC236}">
-                <a16:creationId xmlns:a16="http://schemas.microsoft.com/office/drawing/2014/main" id="{8EE02A46-1820-E4DE-B6FE-2A21B42EAE95}"/>
+                <a16:creationId xmlns:a16="http://schemas.microsoft.com/office/drawing/2014/main" id="{B521C660-FAD4-0769-65B6-920C3034F137}"/>
               </a:ext>
             </a:extLst>
           </p:cNvPr>
@@ -6667,8 +6987,8 @@
         </p:blipFill>
         <p:spPr>
           <a:xfrm>
-            <a:off x="0" y="1336074"/>
-            <a:ext cx="9144000" cy="2471352"/>
+            <a:off x="0" y="1032021"/>
+            <a:ext cx="9144000" cy="3079457"/>
           </a:xfrm>
           <a:prstGeom prst="rect">
             <a:avLst/>
@@ -6751,10 +7071,10 @@
       </p:sp>
       <p:pic>
         <p:nvPicPr>
-          <p:cNvPr id="4" name="Imagen 3">
+          <p:cNvPr id="6" name="Imagen 5">
             <a:extLst>
               <a:ext uri="{FF2B5EF4-FFF2-40B4-BE49-F238E27FC236}">
-                <a16:creationId xmlns:a16="http://schemas.microsoft.com/office/drawing/2014/main" id="{964AF0F7-BEB2-C938-52ED-D374DA6835F5}"/>
+                <a16:creationId xmlns:a16="http://schemas.microsoft.com/office/drawing/2014/main" id="{A66146D6-6D4C-4AB8-A32B-7F4191E60A26}"/>
               </a:ext>
             </a:extLst>
           </p:cNvPr>
@@ -6771,38 +7091,8 @@
         </p:blipFill>
         <p:spPr>
           <a:xfrm>
-            <a:off x="671154" y="414181"/>
-            <a:ext cx="7728666" cy="2522785"/>
-          </a:xfrm>
-          <a:prstGeom prst="rect">
-            <a:avLst/>
-          </a:prstGeom>
-        </p:spPr>
-      </p:pic>
-      <p:pic>
-        <p:nvPicPr>
-          <p:cNvPr id="9" name="Imagen 8">
-            <a:extLst>
-              <a:ext uri="{FF2B5EF4-FFF2-40B4-BE49-F238E27FC236}">
-                <a16:creationId xmlns:a16="http://schemas.microsoft.com/office/drawing/2014/main" id="{45073CBF-9CA6-A844-A109-6335353D4BB0}"/>
-              </a:ext>
-            </a:extLst>
-          </p:cNvPr>
-          <p:cNvPicPr>
-            <a:picLocks noChangeAspect="1"/>
-          </p:cNvPicPr>
-          <p:nvPr/>
-        </p:nvPicPr>
-        <p:blipFill>
-          <a:blip r:embed="rId3"/>
-          <a:stretch>
-            <a:fillRect/>
-          </a:stretch>
-        </p:blipFill>
-        <p:spPr>
-          <a:xfrm>
-            <a:off x="0" y="2838804"/>
-            <a:ext cx="9144000" cy="2304696"/>
+            <a:off x="558244" y="599441"/>
+            <a:ext cx="7954485" cy="4544059"/>
           </a:xfrm>
           <a:prstGeom prst="rect">
             <a:avLst/>
@@ -6823,6 +7113,386 @@
 </file>
 
 <file path=ppt/slides/slide5.xml><?xml version="1.0" encoding="utf-8"?>
+<p:sld xmlns:a="http://schemas.openxmlformats.org/drawingml/2006/main" xmlns:r="http://schemas.openxmlformats.org/officeDocument/2006/relationships" xmlns:p="http://schemas.openxmlformats.org/presentationml/2006/main">
+  <p:cSld>
+    <p:bg>
+      <p:bgPr>
+        <a:solidFill>
+          <a:srgbClr val="F4F6F8"/>
+        </a:solidFill>
+        <a:effectLst/>
+      </p:bgPr>
+    </p:bg>
+    <p:spTree>
+      <p:nvGrpSpPr>
+        <p:cNvPr id="1" name=""/>
+        <p:cNvGrpSpPr/>
+        <p:nvPr/>
+      </p:nvGrpSpPr>
+      <p:grpSpPr>
+        <a:xfrm>
+          <a:off x="0" y="0"/>
+          <a:ext cx="0" cy="0"/>
+          <a:chOff x="0" y="0"/>
+          <a:chExt cx="0" cy="0"/>
+        </a:xfrm>
+      </p:grpSpPr>
+      <p:sp>
+        <p:nvSpPr>
+          <p:cNvPr id="4" name="CuadroTexto 3">
+            <a:extLst>
+              <a:ext uri="{FF2B5EF4-FFF2-40B4-BE49-F238E27FC236}">
+                <a16:creationId xmlns:a16="http://schemas.microsoft.com/office/drawing/2014/main" id="{B1A10F16-34D0-99BC-C2CE-7357DD481141}"/>
+              </a:ext>
+            </a:extLst>
+          </p:cNvPr>
+          <p:cNvSpPr txBox="1"/>
+          <p:nvPr/>
+        </p:nvSpPr>
+        <p:spPr>
+          <a:xfrm>
+            <a:off x="1828800" y="0"/>
+            <a:ext cx="5486400" cy="523220"/>
+          </a:xfrm>
+          <a:prstGeom prst="rect">
+            <a:avLst/>
+          </a:prstGeom>
+          <a:noFill/>
+        </p:spPr>
+        <p:txBody>
+          <a:bodyPr wrap="square" rtlCol="0">
+            <a:spAutoFit/>
+          </a:bodyPr>
+          <a:lstStyle/>
+          <a:p>
+            <a:pPr algn="ctr"/>
+            <a:r>
+              <a:rPr lang="es-MX" sz="2800" b="1" dirty="0">
+                <a:latin typeface="Montserrat" pitchFamily="2" charset="0"/>
+              </a:rPr>
+              <a:t>Gobernador</a:t>
+            </a:r>
+          </a:p>
+        </p:txBody>
+      </p:sp>
+      <p:pic>
+        <p:nvPicPr>
+          <p:cNvPr id="6" name="Imagen 5">
+            <a:extLst>
+              <a:ext uri="{FF2B5EF4-FFF2-40B4-BE49-F238E27FC236}">
+                <a16:creationId xmlns:a16="http://schemas.microsoft.com/office/drawing/2014/main" id="{DF652635-25A0-ED62-FEA3-F25D46AC4411}"/>
+              </a:ext>
+            </a:extLst>
+          </p:cNvPr>
+          <p:cNvPicPr>
+            <a:picLocks noChangeAspect="1"/>
+          </p:cNvPicPr>
+          <p:nvPr/>
+        </p:nvPicPr>
+        <p:blipFill>
+          <a:blip r:embed="rId2"/>
+          <a:stretch>
+            <a:fillRect/>
+          </a:stretch>
+        </p:blipFill>
+        <p:spPr>
+          <a:xfrm>
+            <a:off x="209377" y="406016"/>
+            <a:ext cx="8652222" cy="4592497"/>
+          </a:xfrm>
+          <a:prstGeom prst="rect">
+            <a:avLst/>
+          </a:prstGeom>
+        </p:spPr>
+      </p:pic>
+    </p:spTree>
+    <p:extLst>
+      <p:ext uri="{BB962C8B-B14F-4D97-AF65-F5344CB8AC3E}">
+        <p14:creationId xmlns:p14="http://schemas.microsoft.com/office/powerpoint/2010/main" val="3702185673"/>
+      </p:ext>
+    </p:extLst>
+  </p:cSld>
+  <p:clrMapOvr>
+    <a:masterClrMapping/>
+  </p:clrMapOvr>
+</p:sld>
+</file>
+
+<file path=ppt/slides/slide6.xml><?xml version="1.0" encoding="utf-8"?>
+<p:sld xmlns:a="http://schemas.openxmlformats.org/drawingml/2006/main" xmlns:r="http://schemas.openxmlformats.org/officeDocument/2006/relationships" xmlns:p="http://schemas.openxmlformats.org/presentationml/2006/main">
+  <p:cSld>
+    <p:bg>
+      <p:bgPr>
+        <a:solidFill>
+          <a:schemeClr val="tx2"/>
+        </a:solidFill>
+        <a:effectLst/>
+      </p:bgPr>
+    </p:bg>
+    <p:spTree>
+      <p:nvGrpSpPr>
+        <p:cNvPr id="1" name=""/>
+        <p:cNvGrpSpPr/>
+        <p:nvPr/>
+      </p:nvGrpSpPr>
+      <p:grpSpPr>
+        <a:xfrm>
+          <a:off x="0" y="0"/>
+          <a:ext cx="0" cy="0"/>
+          <a:chOff x="0" y="0"/>
+          <a:chExt cx="0" cy="0"/>
+        </a:xfrm>
+      </p:grpSpPr>
+      <p:pic>
+        <p:nvPicPr>
+          <p:cNvPr id="1026" name="Picture 2">
+            <a:extLst>
+              <a:ext uri="{FF2B5EF4-FFF2-40B4-BE49-F238E27FC236}">
+                <a16:creationId xmlns:a16="http://schemas.microsoft.com/office/drawing/2014/main" id="{D6432AA0-4388-FC53-5E56-FEB1899307BE}"/>
+              </a:ext>
+            </a:extLst>
+          </p:cNvPr>
+          <p:cNvPicPr>
+            <a:picLocks noChangeAspect="1" noChangeArrowheads="1"/>
+          </p:cNvPicPr>
+          <p:nvPr/>
+        </p:nvPicPr>
+        <p:blipFill>
+          <a:blip r:embed="rId2">
+            <a:extLst>
+              <a:ext uri="{28A0092B-C50C-407E-A947-70E740481C1C}">
+                <a14:useLocalDpi xmlns:a14="http://schemas.microsoft.com/office/drawing/2010/main" val="0"/>
+              </a:ext>
+            </a:extLst>
+          </a:blip>
+          <a:srcRect/>
+          <a:stretch>
+            <a:fillRect/>
+          </a:stretch>
+        </p:blipFill>
+        <p:spPr bwMode="auto">
+          <a:xfrm>
+            <a:off x="4551420" y="1199192"/>
+            <a:ext cx="4592580" cy="2940704"/>
+          </a:xfrm>
+          <a:prstGeom prst="rect">
+            <a:avLst/>
+          </a:prstGeom>
+          <a:noFill/>
+          <a:extLst>
+            <a:ext uri="{909E8E84-426E-40DD-AFC4-6F175D3DCCD1}">
+              <a14:hiddenFill xmlns:a14="http://schemas.microsoft.com/office/drawing/2010/main">
+                <a:solidFill>
+                  <a:srgbClr val="FFFFFF"/>
+                </a:solidFill>
+              </a14:hiddenFill>
+            </a:ext>
+          </a:extLst>
+        </p:spPr>
+      </p:pic>
+      <p:pic>
+        <p:nvPicPr>
+          <p:cNvPr id="1028" name="Picture 4">
+            <a:extLst>
+              <a:ext uri="{FF2B5EF4-FFF2-40B4-BE49-F238E27FC236}">
+                <a16:creationId xmlns:a16="http://schemas.microsoft.com/office/drawing/2014/main" id="{6927491A-4110-C2C9-913F-87EBCA30C616}"/>
+              </a:ext>
+            </a:extLst>
+          </p:cNvPr>
+          <p:cNvPicPr>
+            <a:picLocks noChangeAspect="1" noChangeArrowheads="1"/>
+          </p:cNvPicPr>
+          <p:nvPr/>
+        </p:nvPicPr>
+        <p:blipFill>
+          <a:blip r:embed="rId3">
+            <a:extLst>
+              <a:ext uri="{28A0092B-C50C-407E-A947-70E740481C1C}">
+                <a14:useLocalDpi xmlns:a14="http://schemas.microsoft.com/office/drawing/2010/main" val="0"/>
+              </a:ext>
+            </a:extLst>
+          </a:blip>
+          <a:srcRect/>
+          <a:stretch>
+            <a:fillRect/>
+          </a:stretch>
+        </p:blipFill>
+        <p:spPr bwMode="auto">
+          <a:xfrm>
+            <a:off x="0" y="1199192"/>
+            <a:ext cx="4551420" cy="2914348"/>
+          </a:xfrm>
+          <a:prstGeom prst="rect">
+            <a:avLst/>
+          </a:prstGeom>
+          <a:noFill/>
+          <a:extLst>
+            <a:ext uri="{909E8E84-426E-40DD-AFC4-6F175D3DCCD1}">
+              <a14:hiddenFill xmlns:a14="http://schemas.microsoft.com/office/drawing/2010/main">
+                <a:solidFill>
+                  <a:srgbClr val="FFFFFF"/>
+                </a:solidFill>
+              </a14:hiddenFill>
+            </a:ext>
+          </a:extLst>
+        </p:spPr>
+      </p:pic>
+      <p:sp>
+        <p:nvSpPr>
+          <p:cNvPr id="6" name="CuadroTexto 5">
+            <a:extLst>
+              <a:ext uri="{FF2B5EF4-FFF2-40B4-BE49-F238E27FC236}">
+                <a16:creationId xmlns:a16="http://schemas.microsoft.com/office/drawing/2014/main" id="{4F44EDBF-F722-BA58-0032-A9569851BA11}"/>
+              </a:ext>
+            </a:extLst>
+          </p:cNvPr>
+          <p:cNvSpPr txBox="1"/>
+          <p:nvPr/>
+        </p:nvSpPr>
+        <p:spPr>
+          <a:xfrm>
+            <a:off x="1828800" y="0"/>
+            <a:ext cx="5486400" cy="523220"/>
+          </a:xfrm>
+          <a:prstGeom prst="rect">
+            <a:avLst/>
+          </a:prstGeom>
+          <a:noFill/>
+        </p:spPr>
+        <p:txBody>
+          <a:bodyPr wrap="square" rtlCol="0">
+            <a:spAutoFit/>
+          </a:bodyPr>
+          <a:lstStyle/>
+          <a:p>
+            <a:pPr algn="ctr"/>
+            <a:r>
+              <a:rPr lang="es-MX" sz="2800" b="1" dirty="0">
+                <a:latin typeface="Montserrat" pitchFamily="2" charset="0"/>
+              </a:rPr>
+              <a:t>Gobernador</a:t>
+            </a:r>
+          </a:p>
+        </p:txBody>
+      </p:sp>
+    </p:spTree>
+    <p:extLst>
+      <p:ext uri="{BB962C8B-B14F-4D97-AF65-F5344CB8AC3E}">
+        <p14:creationId xmlns:p14="http://schemas.microsoft.com/office/powerpoint/2010/main" val="2080082740"/>
+      </p:ext>
+    </p:extLst>
+  </p:cSld>
+  <p:clrMapOvr>
+    <a:masterClrMapping/>
+  </p:clrMapOvr>
+</p:sld>
+</file>
+
+<file path=ppt/slides/slide7.xml><?xml version="1.0" encoding="utf-8"?>
+<p:sld xmlns:a="http://schemas.openxmlformats.org/drawingml/2006/main" xmlns:r="http://schemas.openxmlformats.org/officeDocument/2006/relationships" xmlns:p="http://schemas.openxmlformats.org/presentationml/2006/main">
+  <p:cSld>
+    <p:spTree>
+      <p:nvGrpSpPr>
+        <p:cNvPr id="1" name=""/>
+        <p:cNvGrpSpPr/>
+        <p:nvPr/>
+      </p:nvGrpSpPr>
+      <p:grpSpPr>
+        <a:xfrm>
+          <a:off x="0" y="0"/>
+          <a:ext cx="0" cy="0"/>
+          <a:chOff x="0" y="0"/>
+          <a:chExt cx="0" cy="0"/>
+        </a:xfrm>
+      </p:grpSpPr>
+      <p:pic>
+        <p:nvPicPr>
+          <p:cNvPr id="5" name="Imagen 4">
+            <a:extLst>
+              <a:ext uri="{FF2B5EF4-FFF2-40B4-BE49-F238E27FC236}">
+                <a16:creationId xmlns:a16="http://schemas.microsoft.com/office/drawing/2014/main" id="{A7208C45-84F5-11F3-B34F-637D48CB04F6}"/>
+              </a:ext>
+            </a:extLst>
+          </p:cNvPr>
+          <p:cNvPicPr>
+            <a:picLocks noChangeAspect="1"/>
+          </p:cNvPicPr>
+          <p:nvPr/>
+        </p:nvPicPr>
+        <p:blipFill>
+          <a:blip r:embed="rId2"/>
+          <a:stretch>
+            <a:fillRect/>
+          </a:stretch>
+        </p:blipFill>
+        <p:spPr>
+          <a:xfrm>
+            <a:off x="1233021" y="1104695"/>
+            <a:ext cx="6677957" cy="2934109"/>
+          </a:xfrm>
+          <a:prstGeom prst="rect">
+            <a:avLst/>
+          </a:prstGeom>
+        </p:spPr>
+      </p:pic>
+      <p:sp>
+        <p:nvSpPr>
+          <p:cNvPr id="6" name="CuadroTexto 5">
+            <a:extLst>
+              <a:ext uri="{FF2B5EF4-FFF2-40B4-BE49-F238E27FC236}">
+                <a16:creationId xmlns:a16="http://schemas.microsoft.com/office/drawing/2014/main" id="{829C81F3-7718-5A18-6786-2D5DD51ED25E}"/>
+              </a:ext>
+            </a:extLst>
+          </p:cNvPr>
+          <p:cNvSpPr txBox="1"/>
+          <p:nvPr/>
+        </p:nvSpPr>
+        <p:spPr>
+          <a:xfrm>
+            <a:off x="908175" y="152426"/>
+            <a:ext cx="7254625" cy="369332"/>
+          </a:xfrm>
+          <a:prstGeom prst="rect">
+            <a:avLst/>
+          </a:prstGeom>
+          <a:noFill/>
+        </p:spPr>
+        <p:txBody>
+          <a:bodyPr wrap="square">
+            <a:spAutoFit/>
+          </a:bodyPr>
+          <a:lstStyle/>
+          <a:p>
+            <a:pPr algn="ctr">
+              <a:buNone/>
+            </a:pPr>
+            <a:r>
+              <a:rPr lang="es-MX" sz="1800" b="1" i="0" dirty="0">
+                <a:solidFill>
+                  <a:srgbClr val="000000"/>
+                </a:solidFill>
+                <a:effectLst/>
+                <a:latin typeface="Montserrat" pitchFamily="2" charset="0"/>
+              </a:rPr>
+              <a:t>Detalle de Notas negativas y positivas en primeras planas</a:t>
+            </a:r>
+          </a:p>
+        </p:txBody>
+      </p:sp>
+    </p:spTree>
+    <p:extLst>
+      <p:ext uri="{BB962C8B-B14F-4D97-AF65-F5344CB8AC3E}">
+        <p14:creationId xmlns:p14="http://schemas.microsoft.com/office/powerpoint/2010/main" val="301061349"/>
+      </p:ext>
+    </p:extLst>
+  </p:cSld>
+  <p:clrMapOvr>
+    <a:masterClrMapping/>
+  </p:clrMapOvr>
+</p:sld>
+</file>
+
+<file path=ppt/slides/slide8.xml><?xml version="1.0" encoding="utf-8"?>
 <p:sld xmlns:a="http://schemas.openxmlformats.org/drawingml/2006/main" xmlns:r="http://schemas.openxmlformats.org/officeDocument/2006/relationships" xmlns:p="http://schemas.openxmlformats.org/presentationml/2006/main">
   <p:cSld>
     <p:bg>
@@ -6893,10 +7563,10 @@
       </p:sp>
       <p:pic>
         <p:nvPicPr>
-          <p:cNvPr id="7" name="Imagen 6">
+          <p:cNvPr id="4" name="Imagen 3">
             <a:extLst>
               <a:ext uri="{FF2B5EF4-FFF2-40B4-BE49-F238E27FC236}">
-                <a16:creationId xmlns:a16="http://schemas.microsoft.com/office/drawing/2014/main" id="{96A372B4-63F3-FAF1-8E59-FBD58568581F}"/>
+                <a16:creationId xmlns:a16="http://schemas.microsoft.com/office/drawing/2014/main" id="{CC4B01ED-99C6-9431-053D-D1014D2B9DFB}"/>
               </a:ext>
             </a:extLst>
           </p:cNvPr>
@@ -6913,8 +7583,8 @@
         </p:blipFill>
         <p:spPr>
           <a:xfrm>
-            <a:off x="0" y="415478"/>
-            <a:ext cx="9144000" cy="4455419"/>
+            <a:off x="0" y="459657"/>
+            <a:ext cx="9144000" cy="4224185"/>
           </a:xfrm>
           <a:prstGeom prst="rect">
             <a:avLst/>
@@ -6934,7 +7604,7 @@
 </p:sld>
 </file>
 
-<file path=ppt/slides/slide6.xml><?xml version="1.0" encoding="utf-8"?>
+<file path=ppt/slides/slide9.xml><?xml version="1.0" encoding="utf-8"?>
 <p:sld xmlns:a="http://schemas.openxmlformats.org/drawingml/2006/main" xmlns:r="http://schemas.openxmlformats.org/officeDocument/2006/relationships" xmlns:p="http://schemas.openxmlformats.org/presentationml/2006/main">
   <p:cSld>
     <p:spTree>
@@ -6991,10 +7661,10 @@
       </p:sp>
       <p:pic>
         <p:nvPicPr>
-          <p:cNvPr id="9" name="Imagen 8">
+          <p:cNvPr id="3" name="Imagen 2">
             <a:extLst>
               <a:ext uri="{FF2B5EF4-FFF2-40B4-BE49-F238E27FC236}">
-                <a16:creationId xmlns:a16="http://schemas.microsoft.com/office/drawing/2014/main" id="{8240F420-9EB0-E344-6232-BE9487166FA0}"/>
+                <a16:creationId xmlns:a16="http://schemas.microsoft.com/office/drawing/2014/main" id="{47FED3DA-9A9E-D21C-70F7-12222F5FE1F5}"/>
               </a:ext>
             </a:extLst>
           </p:cNvPr>
@@ -7011,8 +7681,8 @@
         </p:blipFill>
         <p:spPr>
           <a:xfrm>
-            <a:off x="0" y="1005867"/>
-            <a:ext cx="9144000" cy="3274642"/>
+            <a:off x="0" y="880085"/>
+            <a:ext cx="9144000" cy="3383330"/>
           </a:xfrm>
           <a:prstGeom prst="rect">
             <a:avLst/>
@@ -7023,306 +7693,6 @@
     <p:extLst>
       <p:ext uri="{BB962C8B-B14F-4D97-AF65-F5344CB8AC3E}">
         <p14:creationId xmlns:p14="http://schemas.microsoft.com/office/powerpoint/2010/main" val="2250269201"/>
-      </p:ext>
-    </p:extLst>
-  </p:cSld>
-  <p:clrMapOvr>
-    <a:masterClrMapping/>
-  </p:clrMapOvr>
-</p:sld>
-</file>
-
-<file path=ppt/slides/slide7.xml><?xml version="1.0" encoding="utf-8"?>
-<p:sld xmlns:a="http://schemas.openxmlformats.org/drawingml/2006/main" xmlns:r="http://schemas.openxmlformats.org/officeDocument/2006/relationships" xmlns:p="http://schemas.openxmlformats.org/presentationml/2006/main">
-  <p:cSld>
-    <p:spTree>
-      <p:nvGrpSpPr>
-        <p:cNvPr id="1" name="">
-          <a:extLst>
-            <a:ext uri="{FF2B5EF4-FFF2-40B4-BE49-F238E27FC236}">
-              <a16:creationId xmlns:a16="http://schemas.microsoft.com/office/drawing/2014/main" id="{DB953E20-D2E3-C7B6-3681-7F75E49F37EF}"/>
-            </a:ext>
-          </a:extLst>
-        </p:cNvPr>
-        <p:cNvGrpSpPr/>
-        <p:nvPr/>
-      </p:nvGrpSpPr>
-      <p:grpSpPr>
-        <a:xfrm>
-          <a:off x="0" y="0"/>
-          <a:ext cx="0" cy="0"/>
-          <a:chOff x="0" y="0"/>
-          <a:chExt cx="0" cy="0"/>
-        </a:xfrm>
-      </p:grpSpPr>
-      <p:sp>
-        <p:nvSpPr>
-          <p:cNvPr id="5" name="CuadroTexto 4">
-            <a:extLst>
-              <a:ext uri="{FF2B5EF4-FFF2-40B4-BE49-F238E27FC236}">
-                <a16:creationId xmlns:a16="http://schemas.microsoft.com/office/drawing/2014/main" id="{2D220DED-6E95-D0AE-57E3-7DFB60F03ADD}"/>
-              </a:ext>
-            </a:extLst>
-          </p:cNvPr>
-          <p:cNvSpPr txBox="1"/>
-          <p:nvPr/>
-        </p:nvSpPr>
-        <p:spPr>
-          <a:xfrm>
-            <a:off x="1183340" y="0"/>
-            <a:ext cx="6763871" cy="369332"/>
-          </a:xfrm>
-          <a:prstGeom prst="rect">
-            <a:avLst/>
-          </a:prstGeom>
-          <a:noFill/>
-        </p:spPr>
-        <p:txBody>
-          <a:bodyPr wrap="square" rtlCol="0">
-            <a:spAutoFit/>
-          </a:bodyPr>
-          <a:lstStyle/>
-          <a:p>
-            <a:pPr algn="ctr"/>
-            <a:r>
-              <a:rPr lang="es-MX" sz="1800" b="1" dirty="0">
-                <a:latin typeface="Montserrat" panose="00000500000000000000" pitchFamily="2" charset="0"/>
-              </a:rPr>
-              <a:t>Información de gobierno en radiodifusoras</a:t>
-            </a:r>
-          </a:p>
-        </p:txBody>
-      </p:sp>
-      <p:pic>
-        <p:nvPicPr>
-          <p:cNvPr id="7" name="Imagen 6">
-            <a:extLst>
-              <a:ext uri="{FF2B5EF4-FFF2-40B4-BE49-F238E27FC236}">
-                <a16:creationId xmlns:a16="http://schemas.microsoft.com/office/drawing/2014/main" id="{2FCDB21B-6230-ACE6-BE7D-2AFCB9C576B3}"/>
-              </a:ext>
-            </a:extLst>
-          </p:cNvPr>
-          <p:cNvPicPr>
-            <a:picLocks noChangeAspect="1"/>
-          </p:cNvPicPr>
-          <p:nvPr/>
-        </p:nvPicPr>
-        <p:blipFill>
-          <a:blip r:embed="rId2"/>
-          <a:stretch>
-            <a:fillRect/>
-          </a:stretch>
-        </p:blipFill>
-        <p:spPr>
-          <a:xfrm>
-            <a:off x="0" y="343275"/>
-            <a:ext cx="9144000" cy="4456950"/>
-          </a:xfrm>
-          <a:prstGeom prst="rect">
-            <a:avLst/>
-          </a:prstGeom>
-        </p:spPr>
-      </p:pic>
-    </p:spTree>
-    <p:extLst>
-      <p:ext uri="{BB962C8B-B14F-4D97-AF65-F5344CB8AC3E}">
-        <p14:creationId xmlns:p14="http://schemas.microsoft.com/office/powerpoint/2010/main" val="4224919290"/>
-      </p:ext>
-    </p:extLst>
-  </p:cSld>
-  <p:clrMapOvr>
-    <a:masterClrMapping/>
-  </p:clrMapOvr>
-</p:sld>
-</file>
-
-<file path=ppt/slides/slide8.xml><?xml version="1.0" encoding="utf-8"?>
-<p:sld xmlns:a="http://schemas.openxmlformats.org/drawingml/2006/main" xmlns:r="http://schemas.openxmlformats.org/officeDocument/2006/relationships" xmlns:p="http://schemas.openxmlformats.org/presentationml/2006/main">
-  <p:cSld>
-    <p:spTree>
-      <p:nvGrpSpPr>
-        <p:cNvPr id="1" name=""/>
-        <p:cNvGrpSpPr/>
-        <p:nvPr/>
-      </p:nvGrpSpPr>
-      <p:grpSpPr>
-        <a:xfrm>
-          <a:off x="0" y="0"/>
-          <a:ext cx="0" cy="0"/>
-          <a:chOff x="0" y="0"/>
-          <a:chExt cx="0" cy="0"/>
-        </a:xfrm>
-      </p:grpSpPr>
-      <p:sp>
-        <p:nvSpPr>
-          <p:cNvPr id="2" name="CuadroTexto 1">
-            <a:extLst>
-              <a:ext uri="{FF2B5EF4-FFF2-40B4-BE49-F238E27FC236}">
-                <a16:creationId xmlns:a16="http://schemas.microsoft.com/office/drawing/2014/main" id="{E270743E-55A0-8447-939B-33D92F1087F2}"/>
-              </a:ext>
-            </a:extLst>
-          </p:cNvPr>
-          <p:cNvSpPr txBox="1"/>
-          <p:nvPr/>
-        </p:nvSpPr>
-        <p:spPr>
-          <a:xfrm>
-            <a:off x="1183340" y="0"/>
-            <a:ext cx="6763871" cy="369332"/>
-          </a:xfrm>
-          <a:prstGeom prst="rect">
-            <a:avLst/>
-          </a:prstGeom>
-          <a:noFill/>
-        </p:spPr>
-        <p:txBody>
-          <a:bodyPr wrap="square" rtlCol="0">
-            <a:spAutoFit/>
-          </a:bodyPr>
-          <a:lstStyle/>
-          <a:p>
-            <a:pPr algn="ctr"/>
-            <a:r>
-              <a:rPr lang="es-MX" sz="1800" b="1" dirty="0">
-                <a:latin typeface="Montserrat" panose="00000500000000000000" pitchFamily="2" charset="0"/>
-              </a:rPr>
-              <a:t>Información de gobierno en radiodifusoras</a:t>
-            </a:r>
-          </a:p>
-        </p:txBody>
-      </p:sp>
-      <p:pic>
-        <p:nvPicPr>
-          <p:cNvPr id="7" name="Imagen 6">
-            <a:extLst>
-              <a:ext uri="{FF2B5EF4-FFF2-40B4-BE49-F238E27FC236}">
-                <a16:creationId xmlns:a16="http://schemas.microsoft.com/office/drawing/2014/main" id="{66C771C4-7F09-420B-9DD1-96E82C3B3EB7}"/>
-              </a:ext>
-            </a:extLst>
-          </p:cNvPr>
-          <p:cNvPicPr>
-            <a:picLocks noChangeAspect="1"/>
-          </p:cNvPicPr>
-          <p:nvPr/>
-        </p:nvPicPr>
-        <p:blipFill>
-          <a:blip r:embed="rId2"/>
-          <a:stretch>
-            <a:fillRect/>
-          </a:stretch>
-        </p:blipFill>
-        <p:spPr>
-          <a:xfrm>
-            <a:off x="0" y="876826"/>
-            <a:ext cx="9144000" cy="3389848"/>
-          </a:xfrm>
-          <a:prstGeom prst="rect">
-            <a:avLst/>
-          </a:prstGeom>
-        </p:spPr>
-      </p:pic>
-    </p:spTree>
-    <p:extLst>
-      <p:ext uri="{BB962C8B-B14F-4D97-AF65-F5344CB8AC3E}">
-        <p14:creationId xmlns:p14="http://schemas.microsoft.com/office/powerpoint/2010/main" val="1977228479"/>
-      </p:ext>
-    </p:extLst>
-  </p:cSld>
-  <p:clrMapOvr>
-    <a:masterClrMapping/>
-  </p:clrMapOvr>
-</p:sld>
-</file>
-
-<file path=ppt/slides/slide9.xml><?xml version="1.0" encoding="utf-8"?>
-<p:sld xmlns:a="http://schemas.openxmlformats.org/drawingml/2006/main" xmlns:r="http://schemas.openxmlformats.org/officeDocument/2006/relationships" xmlns:p="http://schemas.openxmlformats.org/presentationml/2006/main">
-  <p:cSld>
-    <p:spTree>
-      <p:nvGrpSpPr>
-        <p:cNvPr id="1" name=""/>
-        <p:cNvGrpSpPr/>
-        <p:nvPr/>
-      </p:nvGrpSpPr>
-      <p:grpSpPr>
-        <a:xfrm>
-          <a:off x="0" y="0"/>
-          <a:ext cx="0" cy="0"/>
-          <a:chOff x="0" y="0"/>
-          <a:chExt cx="0" cy="0"/>
-        </a:xfrm>
-      </p:grpSpPr>
-      <p:sp>
-        <p:nvSpPr>
-          <p:cNvPr id="6" name="CuadroTexto 5">
-            <a:extLst>
-              <a:ext uri="{FF2B5EF4-FFF2-40B4-BE49-F238E27FC236}">
-                <a16:creationId xmlns:a16="http://schemas.microsoft.com/office/drawing/2014/main" id="{CE4F37E4-6BA2-F83F-177F-21C522FF978A}"/>
-              </a:ext>
-            </a:extLst>
-          </p:cNvPr>
-          <p:cNvSpPr txBox="1"/>
-          <p:nvPr/>
-        </p:nvSpPr>
-        <p:spPr>
-          <a:xfrm>
-            <a:off x="1926166" y="88135"/>
-            <a:ext cx="5291667" cy="307777"/>
-          </a:xfrm>
-          <a:prstGeom prst="rect">
-            <a:avLst/>
-          </a:prstGeom>
-          <a:noFill/>
-        </p:spPr>
-        <p:txBody>
-          <a:bodyPr wrap="square" rtlCol="0">
-            <a:spAutoFit/>
-          </a:bodyPr>
-          <a:lstStyle/>
-          <a:p>
-            <a:pPr algn="ctr"/>
-            <a:r>
-              <a:rPr lang="es-MX" b="1" dirty="0">
-                <a:latin typeface="Montserrat" pitchFamily="2" charset="0"/>
-              </a:rPr>
-              <a:t>Temas de gobierno por radiodifusora</a:t>
-            </a:r>
-          </a:p>
-        </p:txBody>
-      </p:sp>
-      <p:pic>
-        <p:nvPicPr>
-          <p:cNvPr id="3" name="Imagen 2">
-            <a:extLst>
-              <a:ext uri="{FF2B5EF4-FFF2-40B4-BE49-F238E27FC236}">
-                <a16:creationId xmlns:a16="http://schemas.microsoft.com/office/drawing/2014/main" id="{3E39F1B1-78FE-E6FC-E82A-1805BC491DC8}"/>
-              </a:ext>
-            </a:extLst>
-          </p:cNvPr>
-          <p:cNvPicPr>
-            <a:picLocks noChangeAspect="1"/>
-          </p:cNvPicPr>
-          <p:nvPr/>
-        </p:nvPicPr>
-        <p:blipFill>
-          <a:blip r:embed="rId2"/>
-          <a:stretch>
-            <a:fillRect/>
-          </a:stretch>
-        </p:blipFill>
-        <p:spPr>
-          <a:xfrm>
-            <a:off x="0" y="1224822"/>
-            <a:ext cx="9144000" cy="2693855"/>
-          </a:xfrm>
-          <a:prstGeom prst="rect">
-            <a:avLst/>
-          </a:prstGeom>
-        </p:spPr>
-      </p:pic>
-    </p:spTree>
-    <p:extLst>
-      <p:ext uri="{BB962C8B-B14F-4D97-AF65-F5344CB8AC3E}">
-        <p14:creationId xmlns:p14="http://schemas.microsoft.com/office/powerpoint/2010/main" val="3202946265"/>
       </p:ext>
     </p:extLst>
   </p:cSld>
